--- a/GPP_ZombieAI_NeesColominaAina_2DAE09.pptx
+++ b/GPP_ZombieAI_NeesColominaAina_2DAE09.pptx
@@ -3328,7 +3328,7 @@
         <p:spPr>
           <a:xfrm>
             <a:off x="1028700" y="2244838"/>
-            <a:ext cx="16230600" cy="5072379"/>
+            <a:ext cx="16230600" cy="5186035"/>
           </a:xfrm>
           <a:prstGeom prst="rect">
             <a:avLst/>
@@ -3348,7 +3348,7 @@
               <a:buChar char="•"/>
             </a:pPr>
             <a:r>
-              <a:rPr lang="en-US" sz="2799" b="1">
+              <a:rPr lang="en-US" sz="2799" b="1" dirty="0">
                 <a:solidFill>
                   <a:srgbClr val="3D3B3A"/>
                 </a:solidFill>
@@ -3360,7 +3360,7 @@
               <a:t>Detection:</a:t>
             </a:r>
             <a:r>
-              <a:rPr lang="en-US" sz="2799">
+              <a:rPr lang="en-US" sz="2799" dirty="0">
                 <a:solidFill>
                   <a:srgbClr val="3D3B3A"/>
                 </a:solidFill>
@@ -3381,7 +3381,7 @@
               <a:buChar char="•"/>
             </a:pPr>
             <a:r>
-              <a:rPr lang="en-US" sz="2799" b="1">
+              <a:rPr lang="en-US" sz="2799" b="1" dirty="0">
                 <a:solidFill>
                   <a:srgbClr val="3D3B3A"/>
                 </a:solidFill>
@@ -3393,7 +3393,7 @@
               <a:t>Shooting and Sprint:</a:t>
             </a:r>
             <a:r>
-              <a:rPr lang="en-US" sz="2799">
+              <a:rPr lang="en-US" sz="2799" dirty="0">
                 <a:solidFill>
                   <a:srgbClr val="3D3B3A"/>
                 </a:solidFill>
@@ -3414,7 +3414,7 @@
               <a:buChar char="•"/>
             </a:pPr>
             <a:r>
-              <a:rPr lang="en-US" sz="2799" b="1">
+              <a:rPr lang="en-US" sz="2799" b="1" dirty="0">
                 <a:solidFill>
                   <a:srgbClr val="3D3B3A"/>
                 </a:solidFill>
@@ -3426,7 +3426,7 @@
               <a:t>Item usage:</a:t>
             </a:r>
             <a:r>
-              <a:rPr lang="en-US" sz="2799">
+              <a:rPr lang="en-US" sz="2799" dirty="0">
                 <a:solidFill>
                   <a:srgbClr val="3D3B3A"/>
                 </a:solidFill>
@@ -3435,7 +3435,31 @@
                 <a:cs typeface="Anca Coder"/>
                 <a:sym typeface="Anca Coder"/>
               </a:rPr>
-              <a:t> Automatically consumes food/medkits when stats are critically low.</a:t>
+              <a:t> Automatically consumes food/</a:t>
+            </a:r>
+            <a:r>
+              <a:rPr lang="en-US" sz="2799" dirty="0" err="1">
+                <a:solidFill>
+                  <a:srgbClr val="3D3B3A"/>
+                </a:solidFill>
+                <a:latin typeface="Anca Coder"/>
+                <a:ea typeface="Anca Coder"/>
+                <a:cs typeface="Anca Coder"/>
+                <a:sym typeface="Anca Coder"/>
+              </a:rPr>
+              <a:t>medkits</a:t>
+            </a:r>
+            <a:r>
+              <a:rPr lang="en-US" sz="2799" dirty="0">
+                <a:solidFill>
+                  <a:srgbClr val="3D3B3A"/>
+                </a:solidFill>
+                <a:latin typeface="Anca Coder"/>
+                <a:ea typeface="Anca Coder"/>
+                <a:cs typeface="Anca Coder"/>
+                <a:sym typeface="Anca Coder"/>
+              </a:rPr>
+              <a:t> when stats are critically low.</a:t>
             </a:r>
           </a:p>
           <a:p>
@@ -3447,7 +3471,7 @@
               <a:buChar char="•"/>
             </a:pPr>
             <a:r>
-              <a:rPr lang="en-US" sz="2799" b="1">
+              <a:rPr lang="en-US" sz="2799" b="1" dirty="0">
                 <a:solidFill>
                   <a:srgbClr val="3D3B3A"/>
                 </a:solidFill>
@@ -3459,7 +3483,7 @@
               <a:t>Avoidance:</a:t>
             </a:r>
             <a:r>
-              <a:rPr lang="en-US" sz="2799">
+              <a:rPr lang="en-US" sz="2799" dirty="0">
                 <a:solidFill>
                   <a:srgbClr val="3D3B3A"/>
                 </a:solidFill>
@@ -3468,7 +3492,31 @@
                 <a:cs typeface="Anca Coder"/>
                 <a:sym typeface="Anca Coder"/>
               </a:rPr>
-              <a:t> Uses blended steering (80% Flee/Evade, 20% Wander) to escape unpredictably. </a:t>
+              <a:t> Uses blended steering to escape while seeking shelter in a house if </a:t>
+            </a:r>
+            <a:r>
+              <a:rPr lang="en-US" sz="2799" dirty="0" err="1">
+                <a:solidFill>
+                  <a:srgbClr val="3D3B3A"/>
+                </a:solidFill>
+                <a:latin typeface="Anca Coder"/>
+                <a:ea typeface="Anca Coder"/>
+                <a:cs typeface="Anca Coder"/>
+                <a:sym typeface="Anca Coder"/>
+              </a:rPr>
+              <a:t>TargetHouse</a:t>
+            </a:r>
+            <a:r>
+              <a:rPr lang="en-US" sz="2799" dirty="0">
+                <a:solidFill>
+                  <a:srgbClr val="3D3B3A"/>
+                </a:solidFill>
+                <a:latin typeface="Anca Coder"/>
+                <a:ea typeface="Anca Coder"/>
+                <a:cs typeface="Anca Coder"/>
+                <a:sym typeface="Anca Coder"/>
+              </a:rPr>
+              <a:t> is set. </a:t>
             </a:r>
           </a:p>
           <a:p>
@@ -3477,7 +3525,7 @@
                 <a:spcPts val="4800"/>
               </a:lnSpc>
             </a:pPr>
-            <a:endParaRPr lang="en-US" sz="2799">
+            <a:endParaRPr lang="en-US" sz="2799" dirty="0">
               <a:solidFill>
                 <a:srgbClr val="3D3B3A"/>
               </a:solidFill>
@@ -4593,7 +4641,7 @@
             </a:r>
           </a:p>
           <a:p>
-            <a:pPr marL="1209039" lvl="2" indent="-403013" algn="l">
+            <a:pPr marL="1209039" lvl="2" indent="-403013">
               <a:lnSpc>
                 <a:spcPts val="4479"/>
               </a:lnSpc>
@@ -4610,7 +4658,7 @@
                 <a:cs typeface="Anca Coder"/>
                 <a:sym typeface="Anca Coder"/>
               </a:rPr>
-              <a:t>Example: Flee ⟶ 80% Flee/Evade, 20% Wander</a:t>
+              <a:t>Example: Flee ⟶ 80% Flee, 15% Seek, 05% Wander</a:t>
             </a:r>
           </a:p>
           <a:p>

--- a/GPP_ZombieAI_NeesColominaAina_2DAE09.pptx
+++ b/GPP_ZombieAI_NeesColominaAina_2DAE09.pptx
@@ -4658,7 +4658,7 @@
                 <a:cs typeface="Anca Coder"/>
                 <a:sym typeface="Anca Coder"/>
               </a:rPr>
-              <a:t>Example: Flee ⟶ 80% Flee, 15% Seek, 05% Wander</a:t>
+              <a:t>Example: Flee ⟶ 70% Flee, 20% Seek, 10% Wander</a:t>
             </a:r>
           </a:p>
           <a:p>
